--- a/lecture/flyer.pptx
+++ b/lecture/flyer.pptx
@@ -302,7 +302,7 @@
           <a:p>
             <a:fld id="{5BCAD085-E8A6-8845-BD4E-CB4CCA059FC4}" type="datetimeFigureOut">
               <a:rPr lang="en-US" smtClean="0"/>
-              <a:t>7/6/2026</a:t>
+              <a:t>7/7/2026</a:t>
             </a:fld>
             <a:endParaRPr lang="en-US"/>
           </a:p>
@@ -470,7 +470,7 @@
           <a:p>
             <a:fld id="{5BCAD085-E8A6-8845-BD4E-CB4CCA059FC4}" type="datetimeFigureOut">
               <a:rPr lang="en-US" smtClean="0"/>
-              <a:t>7/6/2026</a:t>
+              <a:t>7/7/2026</a:t>
             </a:fld>
             <a:endParaRPr lang="en-US"/>
           </a:p>
@@ -648,7 +648,7 @@
           <a:p>
             <a:fld id="{5BCAD085-E8A6-8845-BD4E-CB4CCA059FC4}" type="datetimeFigureOut">
               <a:rPr lang="en-US" smtClean="0"/>
-              <a:t>7/6/2026</a:t>
+              <a:t>7/7/2026</a:t>
             </a:fld>
             <a:endParaRPr lang="en-US"/>
           </a:p>
@@ -816,7 +816,7 @@
           <a:p>
             <a:fld id="{5BCAD085-E8A6-8845-BD4E-CB4CCA059FC4}" type="datetimeFigureOut">
               <a:rPr lang="en-US" smtClean="0"/>
-              <a:t>7/6/2026</a:t>
+              <a:t>7/7/2026</a:t>
             </a:fld>
             <a:endParaRPr lang="en-US"/>
           </a:p>
@@ -1061,7 +1061,7 @@
           <a:p>
             <a:fld id="{5BCAD085-E8A6-8845-BD4E-CB4CCA059FC4}" type="datetimeFigureOut">
               <a:rPr lang="en-US" smtClean="0"/>
-              <a:t>7/6/2026</a:t>
+              <a:t>7/7/2026</a:t>
             </a:fld>
             <a:endParaRPr lang="en-US"/>
           </a:p>
@@ -1346,7 +1346,7 @@
           <a:p>
             <a:fld id="{5BCAD085-E8A6-8845-BD4E-CB4CCA059FC4}" type="datetimeFigureOut">
               <a:rPr lang="en-US" smtClean="0"/>
-              <a:t>7/6/2026</a:t>
+              <a:t>7/7/2026</a:t>
             </a:fld>
             <a:endParaRPr lang="en-US"/>
           </a:p>
@@ -1765,7 +1765,7 @@
           <a:p>
             <a:fld id="{5BCAD085-E8A6-8845-BD4E-CB4CCA059FC4}" type="datetimeFigureOut">
               <a:rPr lang="en-US" smtClean="0"/>
-              <a:t>7/6/2026</a:t>
+              <a:t>7/7/2026</a:t>
             </a:fld>
             <a:endParaRPr lang="en-US"/>
           </a:p>
@@ -1882,7 +1882,7 @@
           <a:p>
             <a:fld id="{5BCAD085-E8A6-8845-BD4E-CB4CCA059FC4}" type="datetimeFigureOut">
               <a:rPr lang="en-US" smtClean="0"/>
-              <a:t>7/6/2026</a:t>
+              <a:t>7/7/2026</a:t>
             </a:fld>
             <a:endParaRPr lang="en-US"/>
           </a:p>
@@ -1977,7 +1977,7 @@
           <a:p>
             <a:fld id="{5BCAD085-E8A6-8845-BD4E-CB4CCA059FC4}" type="datetimeFigureOut">
               <a:rPr lang="en-US" smtClean="0"/>
-              <a:t>7/6/2026</a:t>
+              <a:t>7/7/2026</a:t>
             </a:fld>
             <a:endParaRPr lang="en-US"/>
           </a:p>
@@ -2252,7 +2252,7 @@
           <a:p>
             <a:fld id="{5BCAD085-E8A6-8845-BD4E-CB4CCA059FC4}" type="datetimeFigureOut">
               <a:rPr lang="en-US" smtClean="0"/>
-              <a:t>7/6/2026</a:t>
+              <a:t>7/7/2026</a:t>
             </a:fld>
             <a:endParaRPr lang="en-US"/>
           </a:p>
@@ -2504,7 +2504,7 @@
           <a:p>
             <a:fld id="{5BCAD085-E8A6-8845-BD4E-CB4CCA059FC4}" type="datetimeFigureOut">
               <a:rPr lang="en-US" smtClean="0"/>
-              <a:t>7/6/2026</a:t>
+              <a:t>7/7/2026</a:t>
             </a:fld>
             <a:endParaRPr lang="en-US"/>
           </a:p>
@@ -2715,7 +2715,7 @@
           <a:p>
             <a:fld id="{5BCAD085-E8A6-8845-BD4E-CB4CCA059FC4}" type="datetimeFigureOut">
               <a:rPr lang="en-US" smtClean="0"/>
-              <a:t>7/6/2026</a:t>
+              <a:t>7/7/2026</a:t>
             </a:fld>
             <a:endParaRPr lang="en-US"/>
           </a:p>
@@ -2804,7 +2804,7 @@
           <p:cNvPr id="8" name="TextBox 7">
             <a:extLst>
               <a:ext uri="{FF2B5EF4-FFF2-40B4-BE49-F238E27FC236}">
-                <a16:creationId xmlns:a16="http://schemas.microsoft.com/office/drawing/2014/main" id="{A963A656-7D67-9E57-CA17-759F69832DCB}"/>
+                <a16:creationId xmlns:a16="http://schemas.microsoft.com/office/drawing/2014/main" id="{A94BE5C5-9813-1159-F816-C77ABA589076}"/>
               </a:ext>
             </a:extLst>
           </p:cNvPr>
@@ -4867,16 +4867,40 @@
           </a:p>
         </p:txBody>
       </p:sp>
-      <p:sp>
-        <p:nvSpPr>
-          <p:cNvPr id="42" name="Rectangle 41"/>
+      <p:pic>
+        <p:nvPicPr>
+          <p:cNvPr id="42" name="Picture 41" descr="logo-wimmera-white.png"/>
+          <p:cNvPicPr>
+            <a:picLocks noChangeAspect="1"/>
+          </p:cNvPicPr>
+          <p:nvPr/>
+        </p:nvPicPr>
+        <p:blipFill>
+          <a:blip r:embed="rId2"/>
+          <a:stretch>
+            <a:fillRect/>
+          </a:stretch>
+        </p:blipFill>
+        <p:spPr>
+          <a:xfrm>
+            <a:off x="10144902" y="384048"/>
+            <a:ext cx="1498153" cy="1097280"/>
+          </a:xfrm>
+          <a:prstGeom prst="rect">
+            <a:avLst/>
+          </a:prstGeom>
+        </p:spPr>
+      </p:pic>
+      <p:sp>
+        <p:nvSpPr>
+          <p:cNvPr id="43" name="Rectangle 42"/>
           <p:cNvSpPr/>
           <p:nvPr/>
         </p:nvSpPr>
         <p:spPr>
           <a:xfrm>
-            <a:off x="0" y="6108192"/>
-            <a:ext cx="12191695" cy="749808"/>
+            <a:off x="0" y="6016752"/>
+            <a:ext cx="12191695" cy="841248"/>
           </a:xfrm>
           <a:prstGeom prst="rect">
             <a:avLst/>
@@ -4913,13 +4937,13 @@
       </p:sp>
       <p:sp>
         <p:nvSpPr>
-          <p:cNvPr id="43" name="Rectangle 42"/>
+          <p:cNvPr id="44" name="Rectangle 43"/>
           <p:cNvSpPr/>
           <p:nvPr/>
         </p:nvSpPr>
         <p:spPr>
           <a:xfrm>
-            <a:off x="0" y="6108192"/>
+            <a:off x="0" y="6016752"/>
             <a:ext cx="12191695" cy="45720"/>
           </a:xfrm>
           <a:prstGeom prst="rect">
@@ -4957,14 +4981,14 @@
       </p:sp>
       <p:sp>
         <p:nvSpPr>
-          <p:cNvPr id="44" name="TextBox 43"/>
+          <p:cNvPr id="45" name="TextBox 44"/>
           <p:cNvSpPr txBox="1"/>
           <p:nvPr/>
         </p:nvSpPr>
         <p:spPr>
           <a:xfrm>
-            <a:off x="594360" y="6336902"/>
-            <a:ext cx="10972800" cy="292388"/>
+            <a:off x="594360" y="6291182"/>
+            <a:ext cx="6400800" cy="292388"/>
           </a:xfrm>
           <a:prstGeom prst="rect">
             <a:avLst/>
@@ -4978,25 +5002,46 @@
           <a:lstStyle/>
           <a:p>
             <a:pPr algn="l"/>
-            <a:endParaRPr sz="1300" b="0" dirty="0">
-              <a:solidFill>
-                <a:srgbClr val="FFFFFF"/>
-              </a:solidFill>
-              <a:latin typeface="Segoe UI"/>
-            </a:endParaRPr>
-          </a:p>
-        </p:txBody>
-      </p:sp>
-      <p:sp>
-        <p:nvSpPr>
-          <p:cNvPr id="45" name="TextBox 44"/>
+            <a:r>
+              <a:rPr sz="1300" b="1" dirty="0">
+                <a:solidFill>
+                  <a:srgbClr val="2DD4BF"/>
+                </a:solidFill>
+                <a:latin typeface="Segoe UI"/>
+              </a:rPr>
+              <a:t>ICT108</a:t>
+            </a:r>
+            <a:r>
+              <a:rPr sz="1300" b="0" dirty="0">
+                <a:solidFill>
+                  <a:srgbClr val="9FB3C8"/>
+                </a:solidFill>
+                <a:latin typeface="Segoe UI"/>
+              </a:rPr>
+              <a:t>    ·    </a:t>
+            </a:r>
+            <a:r>
+              <a:rPr sz="1300" b="0" dirty="0">
+                <a:solidFill>
+                  <a:srgbClr val="FFFFFF"/>
+                </a:solidFill>
+                <a:latin typeface="Segoe UI"/>
+              </a:rPr>
+              <a:t>Tuesday 14 July 2026, 2–3 PM</a:t>
+            </a:r>
+          </a:p>
+        </p:txBody>
+      </p:sp>
+      <p:sp>
+        <p:nvSpPr>
+          <p:cNvPr id="46" name="TextBox 45"/>
           <p:cNvSpPr txBox="1"/>
           <p:nvPr/>
         </p:nvSpPr>
         <p:spPr>
           <a:xfrm>
-            <a:off x="9265494" y="6336902"/>
-            <a:ext cx="2333331" cy="292388"/>
+            <a:off x="6400800" y="6016752"/>
+            <a:ext cx="5193792" cy="841248"/>
           </a:xfrm>
           <a:prstGeom prst="rect">
             <a:avLst/>
@@ -5004,27 +5049,33 @@
           <a:noFill/>
         </p:spPr>
         <p:txBody>
-          <a:bodyPr wrap="none" anchor="ctr">
+          <a:bodyPr wrap="square" anchor="ctr">
             <a:spAutoFit/>
           </a:bodyPr>
           <a:lstStyle/>
           <a:p>
             <a:pPr algn="r"/>
             <a:r>
-              <a:rPr lang="en-AU" sz="1300" b="1" dirty="0">
+              <a:rPr sz="1350" b="1">
                 <a:solidFill>
                   <a:srgbClr val="2DD4BF"/>
                 </a:solidFill>
                 <a:latin typeface="Segoe UI"/>
               </a:rPr>
-              <a:t>Mohammad Arifur Rahman</a:t>
-            </a:r>
-            <a:endParaRPr sz="1300" b="1" dirty="0">
-              <a:solidFill>
-                <a:srgbClr val="2DD4BF"/>
-              </a:solidFill>
-              <a:latin typeface="Segoe UI"/>
-            </a:endParaRPr>
+              <a:t>Dr Mohammad Arifur Rahman</a:t>
+            </a:r>
+          </a:p>
+          <a:p>
+            <a:pPr algn="r"/>
+            <a:r>
+              <a:rPr sz="1050" b="0">
+                <a:solidFill>
+                  <a:srgbClr val="9FB3C8"/>
+                </a:solidFill>
+                <a:latin typeface="Segoe UI"/>
+              </a:rPr>
+              <a:t>Analyst Programmer  ·  Wimmera CMA, Victoria</a:t>
+            </a:r>
           </a:p>
         </p:txBody>
       </p:sp>
